--- a/images/kudamono/bonsai.pptx
+++ b/images/kudamono/bonsai.pptx
@@ -6241,27 +6241,7 @@
                   <a:latin typeface="Arial" panose="020B0604020202020204" pitchFamily="34" charset="0"/>
                   <a:cs typeface="Arial" panose="020B0604020202020204" pitchFamily="34" charset="0"/>
                 </a:rPr>
-                <a:t>Bonsai was invented by Lucas </a:t>
-              </a:r>
-              <a:r>
-                <a:rPr lang="en-US" b="1" dirty="0" err="1">
-                  <a:solidFill>
-                    <a:srgbClr val="595959"/>
-                  </a:solidFill>
-                  <a:latin typeface="Arial" panose="020B0604020202020204" pitchFamily="34" charset="0"/>
-                  <a:cs typeface="Arial" panose="020B0604020202020204" pitchFamily="34" charset="0"/>
-                </a:rPr>
-                <a:t>Salafranca</a:t>
-              </a:r>
-              <a:r>
-                <a:rPr lang="en-US" b="1" dirty="0">
-                  <a:solidFill>
-                    <a:srgbClr val="595959"/>
-                  </a:solidFill>
-                  <a:latin typeface="Arial" panose="020B0604020202020204" pitchFamily="34" charset="0"/>
-                  <a:cs typeface="Arial" panose="020B0604020202020204" pitchFamily="34" charset="0"/>
-                </a:rPr>
-                <a:t> (Le </a:t>
+                <a:t>Bonsai was invented by Le </a:t>
               </a:r>
               <a:r>
                 <a:rPr lang="en-US" b="1" dirty="0" err="1">
@@ -6273,16 +6253,13 @@
                 </a:rPr>
                 <a:t>Slo</a:t>
               </a:r>
-              <a:r>
-                <a:rPr lang="en-US" b="1" dirty="0">
-                  <a:solidFill>
-                    <a:srgbClr val="595959"/>
-                  </a:solidFill>
-                  <a:latin typeface="Arial" panose="020B0604020202020204" pitchFamily="34" charset="0"/>
-                  <a:cs typeface="Arial" panose="020B0604020202020204" pitchFamily="34" charset="0"/>
-                </a:rPr>
-                <a:t>)</a:t>
-              </a:r>
+              <a:endParaRPr lang="en-US" b="1" dirty="0">
+                <a:solidFill>
+                  <a:srgbClr val="595959"/>
+                </a:solidFill>
+                <a:latin typeface="Arial" panose="020B0604020202020204" pitchFamily="34" charset="0"/>
+                <a:cs typeface="Arial" panose="020B0604020202020204" pitchFamily="34" charset="0"/>
+              </a:endParaRPr>
             </a:p>
             <a:p>
               <a:r>

--- a/images/kudamono/bonsai.pptx
+++ b/images/kudamono/bonsai.pptx
@@ -17,6 +17,7 @@
     <p:sldId id="265" r:id="rId11"/>
     <p:sldId id="266" r:id="rId12"/>
     <p:sldId id="267" r:id="rId13"/>
+    <p:sldId id="268" r:id="rId14"/>
   </p:sldIdLst>
   <p:sldSz cx="12192000" cy="6858000"/>
   <p:notesSz cx="6858000" cy="9144000"/>
@@ -281,7 +282,7 @@
           <a:p>
             <a:fld id="{3E22E123-1317-4E58-AC6C-4203F2232E49}" type="datetimeFigureOut">
               <a:rPr lang="en-US" smtClean="0"/>
-              <a:t>1/26/2021</a:t>
+              <a:t>1/27/2021</a:t>
             </a:fld>
             <a:endParaRPr lang="en-US"/>
           </a:p>
@@ -479,7 +480,7 @@
           <a:p>
             <a:fld id="{3E22E123-1317-4E58-AC6C-4203F2232E49}" type="datetimeFigureOut">
               <a:rPr lang="en-US" smtClean="0"/>
-              <a:t>1/26/2021</a:t>
+              <a:t>1/27/2021</a:t>
             </a:fld>
             <a:endParaRPr lang="en-US"/>
           </a:p>
@@ -687,7 +688,7 @@
           <a:p>
             <a:fld id="{3E22E123-1317-4E58-AC6C-4203F2232E49}" type="datetimeFigureOut">
               <a:rPr lang="en-US" smtClean="0"/>
-              <a:t>1/26/2021</a:t>
+              <a:t>1/27/2021</a:t>
             </a:fld>
             <a:endParaRPr lang="en-US"/>
           </a:p>
@@ -885,7 +886,7 @@
           <a:p>
             <a:fld id="{3E22E123-1317-4E58-AC6C-4203F2232E49}" type="datetimeFigureOut">
               <a:rPr lang="en-US" smtClean="0"/>
-              <a:t>1/26/2021</a:t>
+              <a:t>1/27/2021</a:t>
             </a:fld>
             <a:endParaRPr lang="en-US"/>
           </a:p>
@@ -1160,7 +1161,7 @@
           <a:p>
             <a:fld id="{3E22E123-1317-4E58-AC6C-4203F2232E49}" type="datetimeFigureOut">
               <a:rPr lang="en-US" smtClean="0"/>
-              <a:t>1/26/2021</a:t>
+              <a:t>1/27/2021</a:t>
             </a:fld>
             <a:endParaRPr lang="en-US"/>
           </a:p>
@@ -1425,7 +1426,7 @@
           <a:p>
             <a:fld id="{3E22E123-1317-4E58-AC6C-4203F2232E49}" type="datetimeFigureOut">
               <a:rPr lang="en-US" smtClean="0"/>
-              <a:t>1/26/2021</a:t>
+              <a:t>1/27/2021</a:t>
             </a:fld>
             <a:endParaRPr lang="en-US"/>
           </a:p>
@@ -1837,7 +1838,7 @@
           <a:p>
             <a:fld id="{3E22E123-1317-4E58-AC6C-4203F2232E49}" type="datetimeFigureOut">
               <a:rPr lang="en-US" smtClean="0"/>
-              <a:t>1/26/2021</a:t>
+              <a:t>1/27/2021</a:t>
             </a:fld>
             <a:endParaRPr lang="en-US"/>
           </a:p>
@@ -1978,7 +1979,7 @@
           <a:p>
             <a:fld id="{3E22E123-1317-4E58-AC6C-4203F2232E49}" type="datetimeFigureOut">
               <a:rPr lang="en-US" smtClean="0"/>
-              <a:t>1/26/2021</a:t>
+              <a:t>1/27/2021</a:t>
             </a:fld>
             <a:endParaRPr lang="en-US"/>
           </a:p>
@@ -2091,7 +2092,7 @@
           <a:p>
             <a:fld id="{3E22E123-1317-4E58-AC6C-4203F2232E49}" type="datetimeFigureOut">
               <a:rPr lang="en-US" smtClean="0"/>
-              <a:t>1/26/2021</a:t>
+              <a:t>1/27/2021</a:t>
             </a:fld>
             <a:endParaRPr lang="en-US"/>
           </a:p>
@@ -2402,7 +2403,7 @@
           <a:p>
             <a:fld id="{3E22E123-1317-4E58-AC6C-4203F2232E49}" type="datetimeFigureOut">
               <a:rPr lang="en-US" smtClean="0"/>
-              <a:t>1/26/2021</a:t>
+              <a:t>1/27/2021</a:t>
             </a:fld>
             <a:endParaRPr lang="en-US"/>
           </a:p>
@@ -2690,7 +2691,7 @@
           <a:p>
             <a:fld id="{3E22E123-1317-4E58-AC6C-4203F2232E49}" type="datetimeFigureOut">
               <a:rPr lang="en-US" smtClean="0"/>
-              <a:t>1/26/2021</a:t>
+              <a:t>1/27/2021</a:t>
             </a:fld>
             <a:endParaRPr lang="en-US"/>
           </a:p>
@@ -2931,7 +2932,7 @@
           <a:p>
             <a:fld id="{3E22E123-1317-4E58-AC6C-4203F2232E49}" type="datetimeFigureOut">
               <a:rPr lang="en-US" smtClean="0"/>
-              <a:t>1/26/2021</a:t>
+              <a:t>1/27/2021</a:t>
             </a:fld>
             <a:endParaRPr lang="en-US"/>
           </a:p>
@@ -6309,6 +6310,100 @@
 </p:sld>
 </file>
 
+<file path=ppt/slides/slide13.xml><?xml version="1.0" encoding="utf-8"?>
+<p:sld xmlns:a="http://schemas.openxmlformats.org/drawingml/2006/main" xmlns:r="http://schemas.openxmlformats.org/officeDocument/2006/relationships" xmlns:p="http://schemas.openxmlformats.org/presentationml/2006/main">
+  <p:cSld>
+    <p:spTree>
+      <p:nvGrpSpPr>
+        <p:cNvPr id="1" name=""/>
+        <p:cNvGrpSpPr/>
+        <p:nvPr/>
+      </p:nvGrpSpPr>
+      <p:grpSpPr>
+        <a:xfrm>
+          <a:off x="0" y="0"/>
+          <a:ext cx="0" cy="0"/>
+          <a:chOff x="0" y="0"/>
+          <a:chExt cx="0" cy="0"/>
+        </a:xfrm>
+      </p:grpSpPr>
+      <p:pic>
+        <p:nvPicPr>
+          <p:cNvPr id="4" name="Picture 3">
+            <a:extLst>
+              <a:ext uri="{FF2B5EF4-FFF2-40B4-BE49-F238E27FC236}">
+                <a16:creationId xmlns:a16="http://schemas.microsoft.com/office/drawing/2014/main" id="{296A0754-71E4-4221-AF44-6AADEBC48DB3}"/>
+              </a:ext>
+            </a:extLst>
+          </p:cNvPr>
+          <p:cNvPicPr>
+            <a:picLocks noChangeAspect="1"/>
+          </p:cNvPicPr>
+          <p:nvPr/>
+        </p:nvPicPr>
+        <p:blipFill>
+          <a:blip r:embed="rId2"/>
+          <a:stretch>
+            <a:fillRect/>
+          </a:stretch>
+        </p:blipFill>
+        <p:spPr>
+          <a:xfrm>
+            <a:off x="3730503" y="1019051"/>
+            <a:ext cx="4730993" cy="4819898"/>
+          </a:xfrm>
+          <a:prstGeom prst="rect">
+            <a:avLst/>
+          </a:prstGeom>
+        </p:spPr>
+      </p:pic>
+      <p:sp>
+        <p:nvSpPr>
+          <p:cNvPr id="5" name="Rectangle 4">
+            <a:extLst>
+              <a:ext uri="{FF2B5EF4-FFF2-40B4-BE49-F238E27FC236}">
+                <a16:creationId xmlns:a16="http://schemas.microsoft.com/office/drawing/2014/main" id="{8FBF5765-AFD7-4BA6-850E-20707A94F083}"/>
+              </a:ext>
+            </a:extLst>
+          </p:cNvPr>
+          <p:cNvSpPr/>
+          <p:nvPr/>
+        </p:nvSpPr>
+        <p:spPr>
+          <a:xfrm>
+            <a:off x="3048000" y="221233"/>
+            <a:ext cx="6096000" cy="646331"/>
+          </a:xfrm>
+          <a:prstGeom prst="rect">
+            <a:avLst/>
+          </a:prstGeom>
+        </p:spPr>
+        <p:txBody>
+          <a:bodyPr>
+            <a:spAutoFit/>
+          </a:bodyPr>
+          <a:lstStyle/>
+          <a:p>
+            <a:r>
+              <a:rPr lang="en-US" dirty="0"/>
+              <a:t>file:///C:/Github/pedropsi.github.io/kudamono.html?W=6&amp;L=w8f15f1f1&amp;S=8DRUR8RRDLLDLDDR2RRDRDD8R3RDDL&amp;G=b</a:t>
+            </a:r>
+          </a:p>
+        </p:txBody>
+      </p:sp>
+    </p:spTree>
+    <p:extLst>
+      <p:ext uri="{BB962C8B-B14F-4D97-AF65-F5344CB8AC3E}">
+        <p14:creationId xmlns:p14="http://schemas.microsoft.com/office/powerpoint/2010/main" val="4153038475"/>
+      </p:ext>
+    </p:extLst>
+  </p:cSld>
+  <p:clrMapOvr>
+    <a:masterClrMapping/>
+  </p:clrMapOvr>
+</p:sld>
+</file>
+
 <file path=ppt/slides/slide2.xml><?xml version="1.0" encoding="utf-8"?>
 <p:sld xmlns:a="http://schemas.openxmlformats.org/drawingml/2006/main" xmlns:r="http://schemas.openxmlformats.org/officeDocument/2006/relationships" xmlns:p="http://schemas.openxmlformats.org/presentationml/2006/main">
   <p:cSld>

--- a/images/kudamono/bonsai.pptx
+++ b/images/kudamono/bonsai.pptx
@@ -18,6 +18,7 @@
     <p:sldId id="266" r:id="rId12"/>
     <p:sldId id="267" r:id="rId13"/>
     <p:sldId id="268" r:id="rId14"/>
+    <p:sldId id="269" r:id="rId15"/>
   </p:sldIdLst>
   <p:sldSz cx="12192000" cy="6858000"/>
   <p:notesSz cx="6858000" cy="9144000"/>
@@ -282,7 +283,7 @@
           <a:p>
             <a:fld id="{3E22E123-1317-4E58-AC6C-4203F2232E49}" type="datetimeFigureOut">
               <a:rPr lang="en-US" smtClean="0"/>
-              <a:t>1/27/2021</a:t>
+              <a:t>1/30/2021</a:t>
             </a:fld>
             <a:endParaRPr lang="en-US"/>
           </a:p>
@@ -480,7 +481,7 @@
           <a:p>
             <a:fld id="{3E22E123-1317-4E58-AC6C-4203F2232E49}" type="datetimeFigureOut">
               <a:rPr lang="en-US" smtClean="0"/>
-              <a:t>1/27/2021</a:t>
+              <a:t>1/30/2021</a:t>
             </a:fld>
             <a:endParaRPr lang="en-US"/>
           </a:p>
@@ -688,7 +689,7 @@
           <a:p>
             <a:fld id="{3E22E123-1317-4E58-AC6C-4203F2232E49}" type="datetimeFigureOut">
               <a:rPr lang="en-US" smtClean="0"/>
-              <a:t>1/27/2021</a:t>
+              <a:t>1/30/2021</a:t>
             </a:fld>
             <a:endParaRPr lang="en-US"/>
           </a:p>
@@ -886,7 +887,7 @@
           <a:p>
             <a:fld id="{3E22E123-1317-4E58-AC6C-4203F2232E49}" type="datetimeFigureOut">
               <a:rPr lang="en-US" smtClean="0"/>
-              <a:t>1/27/2021</a:t>
+              <a:t>1/30/2021</a:t>
             </a:fld>
             <a:endParaRPr lang="en-US"/>
           </a:p>
@@ -1161,7 +1162,7 @@
           <a:p>
             <a:fld id="{3E22E123-1317-4E58-AC6C-4203F2232E49}" type="datetimeFigureOut">
               <a:rPr lang="en-US" smtClean="0"/>
-              <a:t>1/27/2021</a:t>
+              <a:t>1/30/2021</a:t>
             </a:fld>
             <a:endParaRPr lang="en-US"/>
           </a:p>
@@ -1426,7 +1427,7 @@
           <a:p>
             <a:fld id="{3E22E123-1317-4E58-AC6C-4203F2232E49}" type="datetimeFigureOut">
               <a:rPr lang="en-US" smtClean="0"/>
-              <a:t>1/27/2021</a:t>
+              <a:t>1/30/2021</a:t>
             </a:fld>
             <a:endParaRPr lang="en-US"/>
           </a:p>
@@ -1838,7 +1839,7 @@
           <a:p>
             <a:fld id="{3E22E123-1317-4E58-AC6C-4203F2232E49}" type="datetimeFigureOut">
               <a:rPr lang="en-US" smtClean="0"/>
-              <a:t>1/27/2021</a:t>
+              <a:t>1/30/2021</a:t>
             </a:fld>
             <a:endParaRPr lang="en-US"/>
           </a:p>
@@ -1979,7 +1980,7 @@
           <a:p>
             <a:fld id="{3E22E123-1317-4E58-AC6C-4203F2232E49}" type="datetimeFigureOut">
               <a:rPr lang="en-US" smtClean="0"/>
-              <a:t>1/27/2021</a:t>
+              <a:t>1/30/2021</a:t>
             </a:fld>
             <a:endParaRPr lang="en-US"/>
           </a:p>
@@ -2092,7 +2093,7 @@
           <a:p>
             <a:fld id="{3E22E123-1317-4E58-AC6C-4203F2232E49}" type="datetimeFigureOut">
               <a:rPr lang="en-US" smtClean="0"/>
-              <a:t>1/27/2021</a:t>
+              <a:t>1/30/2021</a:t>
             </a:fld>
             <a:endParaRPr lang="en-US"/>
           </a:p>
@@ -2403,7 +2404,7 @@
           <a:p>
             <a:fld id="{3E22E123-1317-4E58-AC6C-4203F2232E49}" type="datetimeFigureOut">
               <a:rPr lang="en-US" smtClean="0"/>
-              <a:t>1/27/2021</a:t>
+              <a:t>1/30/2021</a:t>
             </a:fld>
             <a:endParaRPr lang="en-US"/>
           </a:p>
@@ -2691,7 +2692,7 @@
           <a:p>
             <a:fld id="{3E22E123-1317-4E58-AC6C-4203F2232E49}" type="datetimeFigureOut">
               <a:rPr lang="en-US" smtClean="0"/>
-              <a:t>1/27/2021</a:t>
+              <a:t>1/30/2021</a:t>
             </a:fld>
             <a:endParaRPr lang="en-US"/>
           </a:p>
@@ -2932,7 +2933,7 @@
           <a:p>
             <a:fld id="{3E22E123-1317-4E58-AC6C-4203F2232E49}" type="datetimeFigureOut">
               <a:rPr lang="en-US" smtClean="0"/>
-              <a:t>1/27/2021</a:t>
+              <a:t>1/30/2021</a:t>
             </a:fld>
             <a:endParaRPr lang="en-US"/>
           </a:p>
@@ -6349,7 +6350,7 @@
         </p:blipFill>
         <p:spPr>
           <a:xfrm>
-            <a:off x="3730503" y="1019051"/>
+            <a:off x="3730503" y="1386696"/>
             <a:ext cx="4730993" cy="4819898"/>
           </a:xfrm>
           <a:prstGeom prst="rect">
@@ -6372,6 +6373,70 @@
         <p:spPr>
           <a:xfrm>
             <a:off x="3048000" y="221233"/>
+            <a:ext cx="6096000" cy="923330"/>
+          </a:xfrm>
+          <a:prstGeom prst="rect">
+            <a:avLst/>
+          </a:prstGeom>
+        </p:spPr>
+        <p:txBody>
+          <a:bodyPr>
+            <a:spAutoFit/>
+          </a:bodyPr>
+          <a:lstStyle/>
+          <a:p>
+            <a:r>
+              <a:rPr lang="en-US" dirty="0"/>
+              <a:t>file:///C:/Github/pedropsi.github.io/kudamono.html?W=6&amp;L=w8f15f1f1&amp;S=8DRUR8RRDLLDLDDR2RRDRDD8R3RDDL&amp;G=b&amp;T=Triparityte</a:t>
+            </a:r>
+          </a:p>
+        </p:txBody>
+      </p:sp>
+    </p:spTree>
+    <p:extLst>
+      <p:ext uri="{BB962C8B-B14F-4D97-AF65-F5344CB8AC3E}">
+        <p14:creationId xmlns:p14="http://schemas.microsoft.com/office/powerpoint/2010/main" val="4153038475"/>
+      </p:ext>
+    </p:extLst>
+  </p:cSld>
+  <p:clrMapOvr>
+    <a:masterClrMapping/>
+  </p:clrMapOvr>
+</p:sld>
+</file>
+
+<file path=ppt/slides/slide14.xml><?xml version="1.0" encoding="utf-8"?>
+<p:sld xmlns:a="http://schemas.openxmlformats.org/drawingml/2006/main" xmlns:r="http://schemas.openxmlformats.org/officeDocument/2006/relationships" xmlns:p="http://schemas.openxmlformats.org/presentationml/2006/main">
+  <p:cSld>
+    <p:spTree>
+      <p:nvGrpSpPr>
+        <p:cNvPr id="1" name=""/>
+        <p:cNvGrpSpPr/>
+        <p:nvPr/>
+      </p:nvGrpSpPr>
+      <p:grpSpPr>
+        <a:xfrm>
+          <a:off x="0" y="0"/>
+          <a:ext cx="0" cy="0"/>
+          <a:chOff x="0" y="0"/>
+          <a:chExt cx="0" cy="0"/>
+        </a:xfrm>
+      </p:grpSpPr>
+      <p:sp>
+        <p:nvSpPr>
+          <p:cNvPr id="4" name="Rectangle 3">
+            <a:extLst>
+              <a:ext uri="{FF2B5EF4-FFF2-40B4-BE49-F238E27FC236}">
+                <a16:creationId xmlns:a16="http://schemas.microsoft.com/office/drawing/2014/main" id="{FBD26BCB-8428-4357-9A02-138CB512187D}"/>
+              </a:ext>
+            </a:extLst>
+          </p:cNvPr>
+          <p:cNvSpPr/>
+          <p:nvPr/>
+        </p:nvSpPr>
+        <p:spPr>
+          <a:xfrm>
+            <a:off x="2934878" y="230659"/>
             <a:ext cx="6096000" cy="646331"/>
           </a:xfrm>
           <a:prstGeom prst="rect">
@@ -6386,15 +6451,53 @@
           <a:p>
             <a:r>
               <a:rPr lang="en-US" dirty="0"/>
-              <a:t>file:///C:/Github/pedropsi.github.io/kudamono.html?W=6&amp;L=w8f15f1f1&amp;S=8DRUR8RRDLLDLDDR2RRDRDD8R3RDDL&amp;G=b</a:t>
+              <a:t>W=7&amp;L=w14w6w1w1w6w1w13w1w6w1&amp;S=11DDDR9ULURRURRDR2RUR4RDLD9DDDRRUULU18D&amp;G=</a:t>
+            </a:r>
+            <a:r>
+              <a:rPr lang="en-US" dirty="0" err="1"/>
+              <a:t>b&amp;T</a:t>
+            </a:r>
+            <a:r>
+              <a:rPr lang="en-US" dirty="0"/>
+              <a:t>=Narrow</a:t>
             </a:r>
           </a:p>
         </p:txBody>
       </p:sp>
+      <p:pic>
+        <p:nvPicPr>
+          <p:cNvPr id="5" name="Picture 4">
+            <a:extLst>
+              <a:ext uri="{FF2B5EF4-FFF2-40B4-BE49-F238E27FC236}">
+                <a16:creationId xmlns:a16="http://schemas.microsoft.com/office/drawing/2014/main" id="{CEF3652B-4961-401B-8CAF-4BB9111D973F}"/>
+              </a:ext>
+            </a:extLst>
+          </p:cNvPr>
+          <p:cNvPicPr>
+            <a:picLocks noChangeAspect="1"/>
+          </p:cNvPicPr>
+          <p:nvPr/>
+        </p:nvPicPr>
+        <p:blipFill>
+          <a:blip r:embed="rId2"/>
+          <a:stretch>
+            <a:fillRect/>
+          </a:stretch>
+        </p:blipFill>
+        <p:spPr>
+          <a:xfrm>
+            <a:off x="3601378" y="989815"/>
+            <a:ext cx="4989244" cy="4878370"/>
+          </a:xfrm>
+          <a:prstGeom prst="rect">
+            <a:avLst/>
+          </a:prstGeom>
+        </p:spPr>
+      </p:pic>
     </p:spTree>
     <p:extLst>
       <p:ext uri="{BB962C8B-B14F-4D97-AF65-F5344CB8AC3E}">
-        <p14:creationId xmlns:p14="http://schemas.microsoft.com/office/powerpoint/2010/main" val="4153038475"/>
+        <p14:creationId xmlns:p14="http://schemas.microsoft.com/office/powerpoint/2010/main" val="1538354608"/>
       </p:ext>
     </p:extLst>
   </p:cSld>
